--- a/presentation/1001_16-17_Winternitz-Merkle-LMS.pptx
+++ b/presentation/1001_16-17_Winternitz-Merkle-LMS.pptx
@@ -11891,7 +11891,7 @@
                             <a:srgbClr val="000000"/>
                           </a:solidFill>
                         </a:rPr>
-                        <a:t>32 B (시드)</a:t>
+                        <a:t>16,384 B (시드 적용 시 32 B)</a:t>
                       </a:r>
                     </a:p>
                   </a:txBody>
@@ -16156,7 +16156,7 @@
           <a:p>
             <a:r>
               <a:rPr dirty="0"/>
-              <a:t>하이퍼트리의 동작과 HSS</a:t>
+              <a:t>하이퍼트리의 동작</a:t>
             </a:r>
           </a:p>
         </p:txBody>
@@ -16173,8 +16173,8 @@
         </p:nvSpPr>
         <p:spPr>
           <a:xfrm>
-            <a:off x="838200" y="3628685"/>
-            <a:ext cx="10515600" cy="3092790"/>
+            <a:off x="838200" y="3730000"/>
+            <a:ext cx="10515600" cy="2800000"/>
           </a:xfrm>
         </p:spPr>
         <p:txBody>
@@ -16209,7 +16209,7 @@
                   <a:srgbClr val="000000"/>
                 </a:solidFill>
               </a:rPr>
-              <a:t>서명 구성: 층 2 OTS 서명·공개키·인증 경로 + 층 1 OTS 서명(층 2 루트에 대한)·인증 경로</a:t>
+              <a:t>서명 구성: 층 2 OTS 서명·공개키·인증 경로 + 층 1 OTS 서명·인증 경로</a:t>
             </a:r>
           </a:p>
           <a:p>
@@ -16230,16 +16230,6 @@
                 </a:solidFill>
               </a:rPr>
               <a:t>장점: 모듈별로 층 2 트리를 독립 관리하는 분산 서명이 가능하다</a:t>
-            </a:r>
-          </a:p>
-          <a:p>
-            <a:r>
-              <a:rPr sz="1800" dirty="0">
-                <a:solidFill>
-                  <a:srgbClr val="000000"/>
-                </a:solidFill>
-              </a:rPr>
-              <a:t>HSS: LMS의 하이퍼트리 변형으로, 표준(SP 800-208)은 최대 8층까지 허용한다</a:t>
             </a:r>
           </a:p>
         </p:txBody>
@@ -16361,7 +16351,7 @@
           <a:p>
             <a:r>
               <a:rPr dirty="0"/>
-              <a:t>Part 2</a:t>
+              <a:t>Part 2 · 네 가지 해법을 하나의 표준으로</a:t>
             </a:r>
           </a:p>
         </p:txBody>
@@ -17709,7 +17699,7 @@
                       <a:srgbClr val="000000"/>
                     </a:solidFill>
                   </a:rPr>
-                  <a:t>모든 해시 호출 앞에 고유 접두사를 붙여 호출들을 서로 독립으로 만든다. 그 결과 형식적 안전성 증명이 가능하다</a:t>
+                  <a:t>모든 해시 호출 앞에 고유 접두사를 붙여 호출들을 서로 독립으로 만든다</a:t>
                 </a:r>
               </a:p>
               <a:p>
@@ -17810,7 +17800,7 @@
                       <a:srgbClr val="000000"/>
                     </a:solidFill>
                   </a:rPr>
-                  <a:t>2 B 상수: 공개키 계산 </a:t>
+                  <a:t>호출 종류를 구분하는 상수: 공개키 계산 </a:t>
                 </a:r>
                 <a14:m>
                   <m:oMath xmlns:m="http://schemas.openxmlformats.org/officeDocument/2006/math">
@@ -17824,16 +17814,22 @@
                       <m:t>0</m:t>
                     </m:r>
                     <m:r>
-                      <a:rPr lang="en-US" i="1">
+                      <m:rPr>
+                        <m:sty m:val="p"/>
+                      </m:rPr>
+                      <a:rPr lang="en-US" i="0">
                         <a:solidFill>
                           <a:srgbClr val="000000"/>
                         </a:solidFill>
                         <a:latin typeface="Cambria Math"/>
                       </a:rPr>
-                      <m:t>𝑥</m:t>
+                      <m:t>x</m:t>
                     </m:r>
                     <m:r>
-                      <a:rPr lang="en-US" i="1">
+                      <m:rPr>
+                        <m:sty m:val="p"/>
+                      </m:rPr>
+                      <a:rPr lang="en-US" i="0">
                         <a:solidFill>
                           <a:srgbClr val="000000"/>
                         </a:solidFill>
@@ -17863,14 +17859,41 @@
                       <m:t>0</m:t>
                     </m:r>
                     <m:r>
-                      <a:rPr lang="en-US" i="1">
+                      <m:rPr>
+                        <m:sty m:val="p"/>
+                      </m:rPr>
+                      <a:rPr lang="en-US" i="0">
                         <a:solidFill>
                           <a:srgbClr val="000000"/>
                         </a:solidFill>
                         <a:latin typeface="Cambria Math"/>
                       </a:rPr>
-                      <m:t>𝑥</m:t>
+                      <m:t>x</m:t>
                     </m:r>
+                    <m:r>
+                      <m:rPr>
+                        <m:sty m:val="p"/>
+                      </m:rPr>
+                      <a:rPr lang="en-US" i="0">
+                        <a:solidFill>
+                          <a:srgbClr val="000000"/>
+                        </a:solidFill>
+                        <a:latin typeface="Cambria Math"/>
+                      </a:rPr>
+                      <m:t>8181</m:t>
+                    </m:r>
+                  </m:oMath>
+                </a14:m>
+                <a:r>
+                  <a:rPr sz="1800" dirty="0">
+                    <a:solidFill>
+                      <a:srgbClr val="000000"/>
+                    </a:solidFill>
+                  </a:rPr>
+                  <a:t>, 리프 노드 </a:t>
+                </a:r>
+                <a14:m>
+                  <m:oMath xmlns:m="http://schemas.openxmlformats.org/officeDocument/2006/math">
                     <m:r>
                       <a:rPr lang="en-US" i="1">
                         <a:solidFill>
@@ -17878,7 +17901,136 @@
                         </a:solidFill>
                         <a:latin typeface="Cambria Math"/>
                       </a:rPr>
-                      <m:t>8181</m:t>
+                      <m:t>0</m:t>
+                    </m:r>
+                    <m:r>
+                      <m:rPr>
+                        <m:sty m:val="p"/>
+                      </m:rPr>
+                      <a:rPr lang="en-US" i="0">
+                        <a:solidFill>
+                          <a:srgbClr val="000000"/>
+                        </a:solidFill>
+                        <a:latin typeface="Cambria Math"/>
+                      </a:rPr>
+                      <m:t>x</m:t>
+                    </m:r>
+                    <m:r>
+                      <m:rPr>
+                        <m:sty m:val="p"/>
+                      </m:rPr>
+                      <a:rPr lang="en-US" i="0">
+                        <a:solidFill>
+                          <a:srgbClr val="000000"/>
+                        </a:solidFill>
+                        <a:latin typeface="Cambria Math"/>
+                      </a:rPr>
+                      <m:t>8282</m:t>
+                    </m:r>
+                  </m:oMath>
+                </a14:m>
+                <a:r>
+                  <a:rPr sz="1800" dirty="0">
+                    <a:solidFill>
+                      <a:srgbClr val="000000"/>
+                    </a:solidFill>
+                  </a:rPr>
+                  <a:t>,</a:t>
+                </a:r>
+                <a:br>
+                  <a:rPr sz="1800" dirty="0">
+                    <a:solidFill>
+                      <a:srgbClr val="000000"/>
+                    </a:solidFill>
+                  </a:rPr>
+                </a:br>
+                <a:r>
+                  <a:rPr sz="1800" dirty="0">
+                    <a:solidFill>
+                      <a:srgbClr val="000000"/>
+                    </a:solidFill>
+                  </a:rPr>
+                  <a:t>내부 노드 </a:t>
+                </a:r>
+                <a14:m>
+                  <m:oMath xmlns:m="http://schemas.openxmlformats.org/officeDocument/2006/math">
+                    <m:r>
+                      <a:rPr lang="en-US" i="1">
+                        <a:solidFill>
+                          <a:srgbClr val="000000"/>
+                        </a:solidFill>
+                        <a:latin typeface="Cambria Math"/>
+                      </a:rPr>
+                      <m:t>0</m:t>
+                    </m:r>
+                    <m:r>
+                      <m:rPr>
+                        <m:sty m:val="p"/>
+                      </m:rPr>
+                      <a:rPr lang="en-US" i="0">
+                        <a:solidFill>
+                          <a:srgbClr val="000000"/>
+                        </a:solidFill>
+                        <a:latin typeface="Cambria Math"/>
+                      </a:rPr>
+                      <m:t>x</m:t>
+                    </m:r>
+                    <m:r>
+                      <m:rPr>
+                        <m:sty m:val="p"/>
+                      </m:rPr>
+                      <a:rPr lang="en-US" i="0">
+                        <a:solidFill>
+                          <a:srgbClr val="000000"/>
+                        </a:solidFill>
+                        <a:latin typeface="Cambria Math"/>
+                      </a:rPr>
+                      <m:t>8383</m:t>
+                    </m:r>
+                  </m:oMath>
+                </a14:m>
+                <a:r>
+                  <a:rPr sz="1800" dirty="0">
+                    <a:solidFill>
+                      <a:srgbClr val="000000"/>
+                    </a:solidFill>
+                  </a:rPr>
+                  <a:t>, 개인키 생성 </a:t>
+                </a:r>
+                <a14:m>
+                  <m:oMath xmlns:m="http://schemas.openxmlformats.org/officeDocument/2006/math">
+                    <m:r>
+                      <a:rPr lang="en-US" i="1">
+                        <a:solidFill>
+                          <a:srgbClr val="000000"/>
+                        </a:solidFill>
+                        <a:latin typeface="Cambria Math"/>
+                      </a:rPr>
+                      <m:t>0</m:t>
+                    </m:r>
+                    <m:r>
+                      <m:rPr>
+                        <m:sty m:val="p"/>
+                      </m:rPr>
+                      <a:rPr lang="en-US" i="0">
+                        <a:solidFill>
+                          <a:srgbClr val="000000"/>
+                        </a:solidFill>
+                        <a:latin typeface="Cambria Math"/>
+                      </a:rPr>
+                      <m:t>x</m:t>
+                    </m:r>
+                    <m:r>
+                      <m:rPr>
+                        <m:sty m:val="p"/>
+                      </m:rPr>
+                      <a:rPr lang="en-US" i="0">
+                        <a:solidFill>
+                          <a:srgbClr val="000000"/>
+                        </a:solidFill>
+                        <a:latin typeface="Cambria Math"/>
+                      </a:rPr>
+                      <m:t>FF</m:t>
                     </m:r>
                   </m:oMath>
                 </a14:m>
@@ -18103,7 +18255,7 @@
                   <a:srgbClr val="000000"/>
                 </a:solidFill>
               </a:rPr>
-              <a:t>네가지 </a:t>
+              <a:t>네 가지 </a:t>
             </a:r>
             <a:r>
               <a:rPr sz="1800" dirty="0">
@@ -18144,7 +18296,7 @@
                   <a:srgbClr val="000000"/>
                 </a:solidFill>
               </a:rPr>
-              <a:t>하이퍼트리와 HSS: 느린 트리 생성 해결</a:t>
+              <a:t>하이퍼트리: 느린 트리 생성 해결</a:t>
             </a:r>
           </a:p>
           <a:p>
@@ -18168,7 +18320,7 @@
                   <a:srgbClr val="000000"/>
                 </a:solidFill>
               </a:rPr>
-              <a:t>LM-OTS: Winternitz에 더한 네 가지 보강</a:t>
+              <a:t>LM-OTS: Winternitz에 더한 네 가지 변경</a:t>
             </a:r>
           </a:p>
           <a:p>
@@ -18179,7 +18331,7 @@
                   <a:srgbClr val="000000"/>
                 </a:solidFill>
               </a:rPr>
-              <a:t>LMS: Merkle 트리 결합과 서명 크기 감소</a:t>
+              <a:t>LMS와 HSS: Merkle 트리 결합과 서명 크기 감소</a:t>
             </a:r>
           </a:p>
           <a:p>
@@ -18428,7 +18580,22 @@
                       <a:srgbClr val="000000"/>
                     </a:solidFill>
                   </a:rPr>
-                  <a:t>번 적용해 </a:t>
+                  <a:t>번</a:t>
+                </a:r>
+                <a:br>
+                  <a:rPr sz="1800" dirty="0">
+                    <a:solidFill>
+                      <a:srgbClr val="000000"/>
+                    </a:solidFill>
+                  </a:rPr>
+                </a:br>
+                <a:r>
+                  <a:rPr sz="1800" dirty="0">
+                    <a:solidFill>
+                      <a:srgbClr val="000000"/>
+                    </a:solidFill>
+                  </a:rPr>
+                  <a:t>적용해 </a:t>
                 </a:r>
                 <a14:m>
                   <m:oMath xmlns:m="http://schemas.openxmlformats.org/officeDocument/2006/math">
@@ -19366,8 +19533,8 @@
         </p:blipFill>
         <p:spPr bwMode="auto">
           <a:xfrm>
-            <a:off x="730623" y="1023941"/>
-            <a:ext cx="4443418" cy="2483898"/>
+            <a:off x="956027" y="1020000"/>
+            <a:ext cx="4087944" cy="2285186"/>
           </a:xfrm>
           <a:prstGeom prst="rect">
             <a:avLst/>
@@ -19406,8 +19573,8 @@
         </p:blipFill>
         <p:spPr>
           <a:xfrm>
-            <a:off x="1098920" y="3556702"/>
-            <a:ext cx="4075121" cy="3138423"/>
+            <a:off x="1125444" y="3365186"/>
+            <a:ext cx="3749111" cy="2887349"/>
           </a:xfrm>
           <a:prstGeom prst="rect">
             <a:avLst/>
@@ -19479,8 +19646,8 @@
             </p:nvSpPr>
             <p:spPr>
               <a:xfrm>
-                <a:off x="838200" y="4079095"/>
-                <a:ext cx="10515600" cy="2563568"/>
+                <a:off x="838200" y="3719165"/>
+                <a:ext cx="10515600" cy="2780834"/>
               </a:xfrm>
             </p:spPr>
             <p:txBody>
@@ -19938,13 +20105,16 @@
                       <m:t>,0</m:t>
                     </m:r>
                     <m:r>
-                      <a:rPr lang="en-US" i="1">
+                      <m:rPr>
+                        <m:sty m:val="p"/>
+                      </m:rPr>
+                      <a:rPr lang="en-US" i="0">
                         <a:solidFill>
                           <a:srgbClr val="000000"/>
                         </a:solidFill>
                         <a:latin typeface="Cambria Math"/>
                       </a:rPr>
-                      <m:t>𝑥</m:t>
+                      <m:t>x</m:t>
                     </m:r>
                     <m:r>
                       <a:rPr lang="en-US" i="1">
@@ -20166,13 +20336,16 @@
                       <m:t>,0</m:t>
                     </m:r>
                     <m:r>
-                      <a:rPr lang="en-US" i="1">
+                      <m:rPr>
+                        <m:sty m:val="p"/>
+                      </m:rPr>
+                      <a:rPr lang="en-US" i="0">
                         <a:solidFill>
                           <a:srgbClr val="000000"/>
                         </a:solidFill>
                         <a:latin typeface="Cambria Math"/>
                       </a:rPr>
-                      <m:t>𝑥</m:t>
+                      <m:t>x</m:t>
                     </m:r>
                     <m:r>
                       <a:rPr lang="en-US" i="1">
@@ -20485,13 +20658,16 @@
                       <m:t>,0</m:t>
                     </m:r>
                     <m:r>
-                      <a:rPr lang="en-US" i="1">
+                      <m:rPr>
+                        <m:sty m:val="p"/>
+                      </m:rPr>
+                      <a:rPr lang="en-US" i="0">
                         <a:solidFill>
                           <a:srgbClr val="000000"/>
                         </a:solidFill>
                         <a:latin typeface="Cambria Math"/>
                       </a:rPr>
-                      <m:t>𝑥𝐹𝐹</m:t>
+                      <m:t>xFF</m:t>
                     </m:r>
                     <m:r>
                       <a:rPr lang="en-US" i="1">
@@ -20621,8 +20797,8 @@
         </p:blipFill>
         <p:spPr bwMode="auto">
           <a:xfrm>
-            <a:off x="3296840" y="1039182"/>
-            <a:ext cx="5598319" cy="2890397"/>
+            <a:off x="3520773" y="1000000"/>
+            <a:ext cx="5150453" cy="2659165"/>
           </a:xfrm>
           <a:prstGeom prst="rect">
             <a:avLst/>
@@ -20701,7 +20877,7 @@
             <p:spPr>
               <a:xfrm>
                 <a:off x="838200" y="1295322"/>
-                <a:ext cx="10515600" cy="2011680"/>
+                <a:ext cx="10515600" cy="2700000"/>
               </a:xfrm>
             </p:spPr>
             <p:txBody>
@@ -20786,7 +20962,7 @@
                       <a:srgbClr val="000000"/>
                     </a:solidFill>
                   </a:rPr>
-                  <a:t>: OTS 공개키가 1,088 B에서 32 B(K)로 줄고, 서명 전체는 약 38% 감소</a:t>
+                  <a:t>: OTS 공개키 1,088 B가 사라져 서명 전체가 약 38% 감소</a:t>
                 </a:r>
               </a:p>
               <a:p>
@@ -20825,6 +21001,16 @@
                     <a:srgbClr val="000000"/>
                   </a:solidFill>
                 </a:endParaRPr>
+              </a:p>
+              <a:p>
+                <a:r>
+                  <a:rPr sz="1800" dirty="0">
+                    <a:solidFill>
+                      <a:srgbClr val="000000"/>
+                    </a:solidFill>
+                  </a:rPr>
+                  <a:t>HSS: LMS를 하이퍼트리로 확장한 스킴이며, 표준은 최대 8층까지 허용한다</a:t>
+                </a:r>
               </a:p>
             </p:txBody>
           </p:sp>
@@ -20905,7 +21091,7 @@
           </p:nvPr>
         </p:nvGraphicFramePr>
         <p:xfrm>
-          <a:off x="838200" y="3383280"/>
+          <a:off x="838200" y="3900000"/>
           <a:ext cx="10515598" cy="2057400"/>
         </p:xfrm>
         <a:graphic>
@@ -23448,7 +23634,22 @@
                   <a:srgbClr val="000000"/>
                 </a:solidFill>
               </a:rPr>
-              <a:t>한계 해결: 시드+PRF(큰 개인키), Winternitz 체인·체크섬(큰 공개키·서명), Merkle 트리(일회성), 하이퍼트리(느린 생성)</a:t>
+              <a:t>한계 해결: 시드+PRF(큰 개인키), Winternitz 체인·체크섬(큰 공개키·서명), Merkle 트리(일회성),</a:t>
+            </a:r>
+            <a:br>
+              <a:rPr sz="1800" dirty="0">
+                <a:solidFill>
+                  <a:srgbClr val="000000"/>
+                </a:solidFill>
+              </a:rPr>
+            </a:br>
+            <a:r>
+              <a:rPr sz="1800" dirty="0">
+                <a:solidFill>
+                  <a:srgbClr val="000000"/>
+                </a:solidFill>
+              </a:rPr>
+              <a:t>하이퍼트리(느린 생성)</a:t>
             </a:r>
           </a:p>
           <a:p>
@@ -23684,7 +23885,7 @@
         <p:spPr>
           <a:xfrm>
             <a:off x="838200" y="1295322"/>
-            <a:ext cx="10515600" cy="1737360"/>
+            <a:ext cx="10515600" cy="2300000"/>
           </a:xfrm>
         </p:spPr>
         <p:txBody>
@@ -23697,7 +23898,7 @@
                   <a:srgbClr val="000000"/>
                 </a:solidFill>
               </a:rPr>
-              <a:t>RSA·타원곡선 서명(수십~수백 바이트)에 비해 키와 서명이 압도적으로 크다</a:t>
+              <a:t>1. 큰 개인키: n비트 값 2n개를 저장한다 (2n²비트)</a:t>
             </a:r>
           </a:p>
           <a:p>
@@ -23707,7 +23908,7 @@
                   <a:srgbClr val="000000"/>
                 </a:solidFill>
               </a:rPr>
-              <a:t>서명 하나가 개인키의 절반을 드러내므로 한 키로 메시지 하나만 서명할 수 있다</a:t>
+              <a:t>2. 큰 공개키·서명: RSA·타원곡선 서명(수십~수백 바이트)에 비해 압도적으로 크다</a:t>
             </a:r>
           </a:p>
           <a:p>
@@ -23717,7 +23918,17 @@
                   <a:srgbClr val="000000"/>
                 </a:solidFill>
               </a:rPr>
-              <a:t>1. 큰 개인키  2. 큰 공개키·서명  3. 개인키 일회성  4. 큰 Merkle 트리의 느린 생성</a:t>
+              <a:t>3. 개인키 일회성: 서명 하나가 개인키 절반을 드러내 한 메시지만 서명할 수 있다</a:t>
+            </a:r>
+          </a:p>
+          <a:p>
+            <a:r>
+              <a:rPr sz="1800" dirty="0">
+                <a:solidFill>
+                  <a:srgbClr val="000000"/>
+                </a:solidFill>
+              </a:rPr>
+              <a:t>4. 큰 Merkle 트리의 느린 생성: 3번을 Merkle 트리로 풀면 새로 생기는 한계</a:t>
             </a:r>
           </a:p>
         </p:txBody>
@@ -23760,7 +23971,7 @@
           </p:nvPr>
         </p:nvGraphicFramePr>
         <p:xfrm>
-          <a:off x="838200" y="3035421"/>
+          <a:off x="838200" y="3750000"/>
           <a:ext cx="10515600" cy="1645920"/>
         </p:xfrm>
         <a:graphic>
@@ -24575,7 +24786,7 @@
                   <a:srgbClr val="000000"/>
                 </a:solidFill>
               </a:rPr>
-              <a:t>각 해법은 해시 함수의 표준 성질(역상·충돌 저항성)만 쓰고 새 가정을 더하지 않는다</a:t>
+              <a:t>각 해법은 해시 함수의 표준 성질(역상·충돌 저항성)만 쓰고 새 가정을 더하지 않는다 (PRF 제외)</a:t>
             </a:r>
           </a:p>
           <a:p>
@@ -25677,7 +25888,22 @@
                       <a:srgbClr val="000000"/>
                     </a:solidFill>
                   </a:rPr>
-                  <a:t>에 반복 적용해 체인을 만든다:</a:t>
+                  <a:t>에</a:t>
+                </a:r>
+                <a:br>
+                  <a:rPr sz="1800" dirty="0">
+                    <a:solidFill>
+                      <a:srgbClr val="000000"/>
+                    </a:solidFill>
+                  </a:rPr>
+                </a:br>
+                <a:r>
+                  <a:rPr sz="1800" dirty="0">
+                    <a:solidFill>
+                      <a:srgbClr val="000000"/>
+                    </a:solidFill>
+                  </a:rPr>
+                  <a:t>반복 적용해 체인을 만든다:</a:t>
                 </a:r>
               </a:p>
               <a:p>
@@ -25939,20 +26165,10 @@
                       <a:srgbClr val="000000"/>
                     </a:solidFill>
                   </a:rPr>
-                  <a:t>앞으로(G 적용)는 누구나 쉽게 계산한다</a:t>
-                </a:r>
-              </a:p>
-              <a:p>
-                <a:r>
-                  <a:rPr sz="1800" dirty="0">
-                    <a:solidFill>
-                      <a:srgbClr val="000000"/>
-                    </a:solidFill>
-                  </a:rPr>
-                  <a:t>뒤로는 G의 역상을 찾아야 하므로 불가능하다 </a:t>
+                  <a:t>앞으로(G 적용)는 누구나 쉽게 계산하지만,</a:t>
                 </a:r>
                 <a:br>
-                  <a:rPr lang="en-US" sz="1800" dirty="0">
+                  <a:rPr sz="1800" dirty="0">
                     <a:solidFill>
                       <a:srgbClr val="000000"/>
                     </a:solidFill>
@@ -25964,7 +26180,22 @@
                       <a:srgbClr val="000000"/>
                     </a:solidFill>
                   </a:rPr>
-                  <a:t>(역상 저항성)</a:t>
+                  <a:t>뒤로는 G의 역상을 찾아야 하므로</a:t>
+                </a:r>
+                <a:br>
+                  <a:rPr sz="1800" dirty="0">
+                    <a:solidFill>
+                      <a:srgbClr val="000000"/>
+                    </a:solidFill>
+                  </a:rPr>
+                </a:br>
+                <a:r>
+                  <a:rPr sz="1800" dirty="0">
+                    <a:solidFill>
+                      <a:srgbClr val="000000"/>
+                    </a:solidFill>
+                  </a:rPr>
+                  <a:t>불가능하다 (역상 저항성)</a:t>
                 </a:r>
               </a:p>
               <a:p>
@@ -25974,7 +26205,37 @@
                       <a:srgbClr val="000000"/>
                     </a:solidFill>
                   </a:rPr>
-                  <a:t>이 '앞으로만 갈 수 있다'가 Winternitz 안전성의 토대다</a:t>
+                  <a:t>오른쪽 Lamport 그림의 G 한 번(길이 1)을</a:t>
+                </a:r>
+                <a:br>
+                  <a:rPr sz="1800" dirty="0">
+                    <a:solidFill>
+                      <a:srgbClr val="000000"/>
+                    </a:solidFill>
+                  </a:rPr>
+                </a:br>
+                <a:r>
+                  <a:rPr sz="1800" dirty="0">
+                    <a:solidFill>
+                      <a:srgbClr val="000000"/>
+                    </a:solidFill>
+                  </a:rPr>
+                  <a:t>길게 늘려, 이 '앞으로만 갈 수 있다'를</a:t>
+                </a:r>
+                <a:br>
+                  <a:rPr sz="1800" dirty="0">
+                    <a:solidFill>
+                      <a:srgbClr val="000000"/>
+                    </a:solidFill>
+                  </a:rPr>
+                </a:br>
+                <a:r>
+                  <a:rPr sz="1800" dirty="0">
+                    <a:solidFill>
+                      <a:srgbClr val="000000"/>
+                    </a:solidFill>
+                  </a:rPr>
+                  <a:t>활용하는 것이 Winternitz다</a:t>
                 </a:r>
               </a:p>
             </p:txBody>
@@ -26296,7 +26557,43 @@
                       <a:srgbClr val="000000"/>
                     </a:solidFill>
                   </a:rPr>
-                  <a:t>로 쪼갠다 (체크섬 블록은 뒤에서 추가)</a:t>
+                  <a:t>로 쪼갠다 (블록 수 </a:t>
+                </a:r>
+                <a14:m xmlns:m="http://schemas.openxmlformats.org/officeDocument/2006/math">
+                  <m:oMath xmlns:mml="http://www.w3.org/1998/Math/MathML">
+                    <m:sSub>
+                      <m:e>
+                        <m:r>
+                          <a:rPr lang="en-US" i="1">
+                            <a:latin typeface="Cambria Math"/>
+                          </a:rPr>
+                          <m:t>ℓ</m:t>
+                        </m:r>
+                      </m:e>
+                      <m:sub>
+                        <m:r>
+                          <a:rPr lang="en-US" i="1">
+                            <a:latin typeface="Cambria Math"/>
+                          </a:rPr>
+                          <m:t>1</m:t>
+                        </m:r>
+                      </m:sub>
+                    </m:sSub>
+                    <m:r>
+                      <a:rPr lang="en-US" i="1">
+                        <a:latin typeface="Cambria Math"/>
+                      </a:rPr>
+                      <m:t>=n/w</m:t>
+                    </m:r>
+                  </m:oMath>
+                </a14:m>
+                <a:r>
+                  <a:rPr sz="1800" dirty="0">
+                    <a:solidFill>
+                      <a:srgbClr val="000000"/>
+                    </a:solidFill>
+                  </a:rPr>
+                  <a:t>, 체크섬 블록은 뒤에서 추가)</a:t>
                 </a:r>
               </a:p>
               <a:p>

--- a/presentation/1001_16-17_Winternitz-Merkle-LMS.pptx
+++ b/presentation/1001_16-17_Winternitz-Merkle-LMS.pptx
@@ -237,7 +237,7 @@
           <a:p>
             <a:fld id="{B52B40C2-3351-40A2-B46D-4B4F877A79B2}" type="datetimeFigureOut">
               <a:rPr lang="ko-KR" altLang="en-US" smtClean="0"/>
-              <a:t>2026-09-30</a:t>
+              <a:t>2026-10-01</a:t>
             </a:fld>
             <a:endParaRPr lang="ko-KR" altLang="en-US" dirty="0"/>
           </a:p>
@@ -3273,7 +3273,7 @@
             <a:fld id="{2ADF637E-82D6-4563-BCF0-C9101F2B5148}" type="datetime1">
               <a:rPr lang="ko-KR" altLang="en-US" smtClean="0"/>
               <a:pPr/>
-              <a:t>2026-09-30</a:t>
+              <a:t>2026-10-01</a:t>
             </a:fld>
             <a:endParaRPr lang="ko-KR" altLang="en-US" dirty="0"/>
           </a:p>
@@ -3488,7 +3488,7 @@
           <a:p>
             <a:fld id="{C9178607-39E6-4CB2-B3CB-AB428B3B6195}" type="datetime1">
               <a:rPr lang="ko-KR" altLang="en-US" smtClean="0"/>
-              <a:t>2026-09-30</a:t>
+              <a:t>2026-10-01</a:t>
             </a:fld>
             <a:endParaRPr lang="ko-KR" altLang="en-US" dirty="0"/>
           </a:p>
@@ -3696,7 +3696,7 @@
           <a:p>
             <a:fld id="{F578A2F2-325F-46A6-8956-F2A49A35BAF8}" type="datetime1">
               <a:rPr lang="ko-KR" altLang="en-US" smtClean="0"/>
-              <a:t>2026-09-30</a:t>
+              <a:t>2026-10-01</a:t>
             </a:fld>
             <a:endParaRPr lang="ko-KR" altLang="en-US" dirty="0"/>
           </a:p>
@@ -3948,7 +3948,7 @@
             <a:fld id="{D58CD677-7AD2-4A27-94BD-C65458D22428}" type="datetime1">
               <a:rPr lang="ko-KR" altLang="en-US" smtClean="0"/>
               <a:pPr/>
-              <a:t>2026-09-30</a:t>
+              <a:t>2026-10-01</a:t>
             </a:fld>
             <a:endParaRPr lang="ko-KR" altLang="en-US" dirty="0"/>
           </a:p>
@@ -6542,7 +6542,7 @@
           <a:p>
             <a:fld id="{2BEF52EC-B397-4D0A-AE91-E0D6840C85A1}" type="datetime1">
               <a:rPr lang="ko-KR" altLang="en-US" smtClean="0"/>
-              <a:t>2026-09-30</a:t>
+              <a:t>2026-10-01</a:t>
             </a:fld>
             <a:endParaRPr lang="ko-KR" altLang="en-US" dirty="0"/>
           </a:p>
@@ -6823,7 +6823,7 @@
           <a:p>
             <a:fld id="{32DD6007-6A42-4C9B-B218-6A32B3A38C67}" type="datetime1">
               <a:rPr lang="ko-KR" altLang="en-US" smtClean="0"/>
-              <a:t>2026-09-30</a:t>
+              <a:t>2026-10-01</a:t>
             </a:fld>
             <a:endParaRPr lang="ko-KR" altLang="en-US" dirty="0"/>
           </a:p>
@@ -7235,7 +7235,7 @@
           <a:p>
             <a:fld id="{F66658DF-8B5F-4351-A42C-BF3495DE7ABE}" type="datetime1">
               <a:rPr lang="ko-KR" altLang="en-US" smtClean="0"/>
-              <a:t>2026-09-30</a:t>
+              <a:t>2026-10-01</a:t>
             </a:fld>
             <a:endParaRPr lang="ko-KR" altLang="en-US" dirty="0"/>
           </a:p>
@@ -7376,7 +7376,7 @@
           <a:p>
             <a:fld id="{74359C48-8150-4FAB-8BEF-6AD61CFC9BBE}" type="datetime1">
               <a:rPr lang="ko-KR" altLang="en-US" smtClean="0"/>
-              <a:t>2026-09-30</a:t>
+              <a:t>2026-10-01</a:t>
             </a:fld>
             <a:endParaRPr lang="ko-KR" altLang="en-US" dirty="0"/>
           </a:p>
@@ -7489,7 +7489,7 @@
           <a:p>
             <a:fld id="{2D41DBCF-1091-470D-AC72-5CF3D00280AC}" type="datetime1">
               <a:rPr lang="ko-KR" altLang="en-US" smtClean="0"/>
-              <a:t>2026-09-30</a:t>
+              <a:t>2026-10-01</a:t>
             </a:fld>
             <a:endParaRPr lang="ko-KR" altLang="en-US" dirty="0"/>
           </a:p>
@@ -7800,7 +7800,7 @@
           <a:p>
             <a:fld id="{4024AE7C-57FB-4DBB-B90C-59145D637BF6}" type="datetime1">
               <a:rPr lang="ko-KR" altLang="en-US" smtClean="0"/>
-              <a:t>2026-09-30</a:t>
+              <a:t>2026-10-01</a:t>
             </a:fld>
             <a:endParaRPr lang="ko-KR" altLang="en-US" dirty="0"/>
           </a:p>
@@ -8088,7 +8088,7 @@
           <a:p>
             <a:fld id="{17D92253-43A0-46E3-918E-3929407A8C01}" type="datetime1">
               <a:rPr lang="ko-KR" altLang="en-US" smtClean="0"/>
-              <a:t>2026-09-30</a:t>
+              <a:t>2026-10-01</a:t>
             </a:fld>
             <a:endParaRPr lang="ko-KR" altLang="en-US" dirty="0"/>
           </a:p>
@@ -9149,7 +9149,7 @@
           <a:p>
             <a:fld id="{75D61A29-800E-482A-B0FD-5A04401ECD92}" type="datetime1">
               <a:rPr lang="ko-KR" altLang="en-US" smtClean="0"/>
-              <a:t>2026-09-30</a:t>
+              <a:t>2026-10-01</a:t>
             </a:fld>
             <a:endParaRPr lang="ko-KR" altLang="en-US" dirty="0"/>
           </a:p>
@@ -9710,8 +9710,8 @@
           </a:p>
         </p:txBody>
       </p:sp>
-      <mc:AlternateContent xmlns:mc="http://schemas.openxmlformats.org/markup-compatibility/2006">
-        <mc:Choice xmlns:a14="http://schemas.microsoft.com/office/drawing/2010/main" Requires="a14">
+      <mc:AlternateContent xmlns:mc="http://schemas.openxmlformats.org/markup-compatibility/2006" xmlns:a14="http://schemas.microsoft.com/office/drawing/2010/main">
+        <mc:Choice Requires="a14">
           <p:sp>
             <p:nvSpPr>
               <p:cNvPr id="3" name="Content Placeholder 2"/>
@@ -9896,7 +9896,7 @@
                     <m:sSup>
                       <m:sSupPr>
                         <m:ctrlPr>
-                          <a:rPr lang="en-US">
+                          <a:rPr lang="en-US" i="1">
                             <a:solidFill>
                               <a:srgbClr val="000000"/>
                             </a:solidFill>
@@ -10012,7 +10012,7 @@
                     <m:sSubSup>
                       <m:sSubSupPr>
                         <m:ctrlPr>
-                          <a:rPr lang="en-US">
+                          <a:rPr lang="en-US" i="1">
                             <a:solidFill>
                               <a:srgbClr val="000000"/>
                             </a:solidFill>
@@ -10114,7 +10114,7 @@
                     <m:sSup>
                       <m:sSupPr>
                         <m:ctrlPr>
-                          <a:rPr lang="en-US">
+                          <a:rPr lang="en-US" i="1">
                             <a:solidFill>
                               <a:srgbClr val="000000"/>
                             </a:solidFill>
@@ -10199,7 +10199,7 @@
                     <m:sSubSup>
                       <m:sSubSupPr>
                         <m:ctrlPr>
-                          <a:rPr lang="en-US">
+                          <a:rPr lang="en-US" i="1">
                             <a:solidFill>
                               <a:srgbClr val="000000"/>
                             </a:solidFill>
@@ -10442,7 +10442,7 @@
                     <m:sSubSup>
                       <m:sSubSupPr>
                         <m:ctrlPr>
-                          <a:rPr lang="en-US">
+                          <a:rPr lang="en-US" i="1">
                             <a:solidFill>
                               <a:srgbClr val="000000"/>
                             </a:solidFill>
@@ -10559,7 +10559,7 @@
             </p:txBody>
           </p:sp>
         </mc:Choice>
-        <mc:Fallback>
+        <mc:Fallback xmlns="">
           <p:sp>
             <p:nvSpPr>
               <p:cNvPr id="3" name="Content Placeholder 2"/>
@@ -10667,8 +10667,8 @@
           </a:p>
         </p:txBody>
       </p:sp>
-      <mc:AlternateContent xmlns:mc="http://schemas.openxmlformats.org/markup-compatibility/2006">
-        <mc:Choice xmlns:a14="http://schemas.microsoft.com/office/drawing/2010/main" Requires="a14">
+      <mc:AlternateContent xmlns:mc="http://schemas.openxmlformats.org/markup-compatibility/2006" xmlns:a14="http://schemas.microsoft.com/office/drawing/2010/main">
+        <mc:Choice Requires="a14">
           <p:sp>
             <p:nvSpPr>
               <p:cNvPr id="3" name="Content Placeholder 2"/>
@@ -10775,7 +10775,7 @@
                     <m:sSub>
                       <m:sSubPr>
                         <m:ctrlPr>
-                          <a:rPr lang="en-US">
+                          <a:rPr lang="en-US" i="1">
                             <a:solidFill>
                               <a:srgbClr val="000000"/>
                             </a:solidFill>
@@ -10945,7 +10945,7 @@
                       <m:sSub>
                         <m:sSubPr>
                           <m:ctrlPr>
-                            <a:rPr lang="en-US">
+                            <a:rPr lang="en-US" i="1">
                               <a:solidFill>
                                 <a:srgbClr val="000000"/>
                               </a:solidFill>
@@ -11353,7 +11353,7 @@
                     <m:sSup>
                       <m:sSupPr>
                         <m:ctrlPr>
-                          <a:rPr lang="en-US">
+                          <a:rPr lang="en-US" i="1">
                             <a:solidFill>
                               <a:srgbClr val="000000"/>
                             </a:solidFill>
@@ -11533,7 +11533,7 @@
             </p:txBody>
           </p:sp>
         </mc:Choice>
-        <mc:Fallback>
+        <mc:Fallback xmlns="">
           <p:sp>
             <p:nvSpPr>
               <p:cNvPr id="3" name="Content Placeholder 2"/>
@@ -12573,8 +12573,8 @@
           </a:p>
         </p:txBody>
       </p:sp>
-      <mc:AlternateContent xmlns:mc="http://schemas.openxmlformats.org/markup-compatibility/2006">
-        <mc:Choice xmlns:a14="http://schemas.microsoft.com/office/drawing/2010/main" Requires="a14">
+      <mc:AlternateContent xmlns:mc="http://schemas.openxmlformats.org/markup-compatibility/2006" xmlns:a14="http://schemas.microsoft.com/office/drawing/2010/main">
+        <mc:Choice Requires="a14">
           <p:sp>
             <p:nvSpPr>
               <p:cNvPr id="3" name="Content Placeholder 2"/>
@@ -12618,7 +12618,7 @@
                     <m:sSup>
                       <m:sSupPr>
                         <m:ctrlPr>
-                          <a:rPr lang="en-US">
+                          <a:rPr lang="en-US" i="1">
                             <a:solidFill>
                               <a:srgbClr val="000000"/>
                             </a:solidFill>
@@ -12674,7 +12674,7 @@
                     <m:sSub>
                       <m:sSubPr>
                         <m:ctrlPr>
-                          <a:rPr lang="en-US">
+                          <a:rPr lang="en-US" i="1">
                             <a:solidFill>
                               <a:srgbClr val="000000"/>
                             </a:solidFill>
@@ -12914,7 +12914,7 @@
                     <m:sSub>
                       <m:sSubPr>
                         <m:ctrlPr>
-                          <a:rPr lang="en-US">
+                          <a:rPr lang="en-US" i="1">
                             <a:solidFill>
                               <a:srgbClr val="000000"/>
                             </a:solidFill>
@@ -12960,7 +12960,7 @@
                     <m:sSub>
                       <m:sSubPr>
                         <m:ctrlPr>
-                          <a:rPr lang="en-US">
+                          <a:rPr lang="en-US" i="1">
                             <a:solidFill>
                               <a:srgbClr val="000000"/>
                             </a:solidFill>
@@ -13005,7 +13005,7 @@
             </p:txBody>
           </p:sp>
         </mc:Choice>
-        <mc:Fallback>
+        <mc:Fallback xmlns="">
           <p:sp>
             <p:nvSpPr>
               <p:cNvPr id="3" name="Content Placeholder 2"/>
@@ -13143,8 +13143,8 @@
           </a:p>
         </p:txBody>
       </p:sp>
-      <mc:AlternateContent xmlns:mc="http://schemas.openxmlformats.org/markup-compatibility/2006">
-        <mc:Choice xmlns:a14="http://schemas.microsoft.com/office/drawing/2010/main" Requires="a14">
+      <mc:AlternateContent xmlns:mc="http://schemas.openxmlformats.org/markup-compatibility/2006" xmlns:a14="http://schemas.microsoft.com/office/drawing/2010/main">
+        <mc:Choice Requires="a14">
           <p:sp>
             <p:nvSpPr>
               <p:cNvPr id="3" name="Content Placeholder 2"/>
@@ -13188,7 +13188,7 @@
                     <m:sSub>
                       <m:sSubPr>
                         <m:ctrlPr>
-                          <a:rPr lang="en-US">
+                          <a:rPr lang="en-US" i="1">
                             <a:solidFill>
                               <a:srgbClr val="000000"/>
                             </a:solidFill>
@@ -13338,7 +13338,7 @@
                     <m:sSub>
                       <m:sSubPr>
                         <m:ctrlPr>
-                          <a:rPr lang="en-US">
+                          <a:rPr lang="en-US" i="1">
                             <a:solidFill>
                               <a:srgbClr val="000000"/>
                             </a:solidFill>
@@ -13555,7 +13555,7 @@
                       <m:sSubSup>
                         <m:sSubSupPr>
                           <m:ctrlPr>
-                            <a:rPr lang="en-US">
+                            <a:rPr lang="en-US" i="1">
                               <a:solidFill>
                                 <a:srgbClr val="000000"/>
                               </a:solidFill>
@@ -13858,7 +13858,7 @@
                       <m:sSubSup>
                         <m:sSubSupPr>
                           <m:ctrlPr>
-                            <a:rPr lang="en-US">
+                            <a:rPr lang="en-US" i="1">
                               <a:solidFill>
                                 <a:srgbClr val="000000"/>
                               </a:solidFill>
@@ -14197,7 +14197,7 @@
                     <m:sSup>
                       <m:sSupPr>
                         <m:ctrlPr>
-                          <a:rPr lang="en-US">
+                          <a:rPr lang="en-US" i="1">
                             <a:solidFill>
                               <a:srgbClr val="000000"/>
                             </a:solidFill>
@@ -14261,7 +14261,7 @@
                     <m:sSub>
                       <m:sSubPr>
                         <m:ctrlPr>
-                          <a:rPr lang="en-US">
+                          <a:rPr lang="en-US" i="1">
                             <a:solidFill>
                               <a:srgbClr val="000000"/>
                             </a:solidFill>
@@ -14317,7 +14317,7 @@
                     <m:sSub>
                       <m:sSubPr>
                         <m:ctrlPr>
-                          <a:rPr lang="en-US">
+                          <a:rPr lang="en-US" i="1">
                             <a:solidFill>
                               <a:srgbClr val="000000"/>
                             </a:solidFill>
@@ -14363,7 +14363,7 @@
                     <m:sSub>
                       <m:sSubPr>
                         <m:ctrlPr>
-                          <a:rPr lang="en-US">
+                          <a:rPr lang="en-US" i="1">
                             <a:solidFill>
                               <a:srgbClr val="000000"/>
                             </a:solidFill>
@@ -14493,7 +14493,7 @@
             </p:txBody>
           </p:sp>
         </mc:Choice>
-        <mc:Fallback>
+        <mc:Fallback xmlns="">
           <p:sp>
             <p:nvSpPr>
               <p:cNvPr id="3" name="Content Placeholder 2"/>
@@ -14637,8 +14637,8 @@
           </a:p>
         </p:txBody>
       </p:sp>
-      <mc:AlternateContent xmlns:mc="http://schemas.openxmlformats.org/markup-compatibility/2006">
-        <mc:Choice xmlns:a14="http://schemas.microsoft.com/office/drawing/2010/main" Requires="a14">
+      <mc:AlternateContent xmlns:mc="http://schemas.openxmlformats.org/markup-compatibility/2006" xmlns:a14="http://schemas.microsoft.com/office/drawing/2010/main">
+        <mc:Choice Requires="a14">
           <p:sp>
             <p:nvSpPr>
               <p:cNvPr id="3" name="Content Placeholder 2"/>
@@ -14745,7 +14745,7 @@
                     <m:sSup>
                       <m:sSupPr>
                         <m:ctrlPr>
-                          <a:rPr lang="en-US">
+                          <a:rPr lang="en-US" i="1">
                             <a:solidFill>
                               <a:srgbClr val="000000"/>
                             </a:solidFill>
@@ -14809,7 +14809,7 @@
             </p:txBody>
           </p:sp>
         </mc:Choice>
-        <mc:Fallback>
+        <mc:Fallback xmlns="">
           <p:sp>
             <p:nvSpPr>
               <p:cNvPr id="3" name="Content Placeholder 2"/>
@@ -15674,8 +15674,8 @@
           </a:p>
         </p:txBody>
       </p:sp>
-      <mc:AlternateContent xmlns:mc="http://schemas.openxmlformats.org/markup-compatibility/2006">
-        <mc:Choice xmlns:a14="http://schemas.microsoft.com/office/drawing/2010/main" Requires="a14">
+      <mc:AlternateContent xmlns:mc="http://schemas.openxmlformats.org/markup-compatibility/2006" xmlns:a14="http://schemas.microsoft.com/office/drawing/2010/main">
+        <mc:Choice Requires="a14">
           <p:sp>
             <p:nvSpPr>
               <p:cNvPr id="3" name="Content Placeholder 2"/>
@@ -15732,7 +15732,7 @@
                     <m:sSup>
                       <m:sSupPr>
                         <m:ctrlPr>
-                          <a:rPr lang="en-US">
+                          <a:rPr lang="en-US" i="1">
                             <a:solidFill>
                               <a:srgbClr val="000000"/>
                             </a:solidFill>
@@ -15818,7 +15818,7 @@
                     <m:sSub>
                       <m:sSubPr>
                         <m:ctrlPr>
-                          <a:rPr lang="en-US">
+                          <a:rPr lang="en-US" i="1">
                             <a:solidFill>
                               <a:srgbClr val="000000"/>
                             </a:solidFill>
@@ -15864,7 +15864,7 @@
                     <m:sSub>
                       <m:sSubPr>
                         <m:ctrlPr>
-                          <a:rPr lang="en-US">
+                          <a:rPr lang="en-US" i="1">
                             <a:solidFill>
                               <a:srgbClr val="000000"/>
                             </a:solidFill>
@@ -15910,7 +15910,7 @@
                     <m:sSup>
                       <m:sSupPr>
                         <m:ctrlPr>
-                          <a:rPr lang="en-US">
+                          <a:rPr lang="en-US" i="1">
                             <a:solidFill>
                               <a:srgbClr val="000000"/>
                             </a:solidFill>
@@ -16023,7 +16023,7 @@
             </p:txBody>
           </p:sp>
         </mc:Choice>
-        <mc:Fallback>
+        <mc:Fallback xmlns="">
           <p:sp>
             <p:nvSpPr>
               <p:cNvPr id="3" name="Content Placeholder 2"/>
@@ -16350,9 +16350,9 @@
           <a:lstStyle/>
           <a:p>
             <a:r>
-              <a:rPr dirty="0"/>
-              <a:t>Part 2 · 네 가지 해법을 하나의 표준으로</a:t>
+              <a:t>Part 2</a:t>
             </a:r>
+            <a:endParaRPr dirty="0"/>
           </a:p>
         </p:txBody>
       </p:sp>
@@ -16426,8 +16426,8 @@
           </a:p>
         </p:txBody>
       </p:sp>
-      <mc:AlternateContent xmlns:mc="http://schemas.openxmlformats.org/markup-compatibility/2006">
-        <mc:Choice xmlns:a14="http://schemas.microsoft.com/office/drawing/2010/main" Requires="a14">
+      <mc:AlternateContent xmlns:mc="http://schemas.openxmlformats.org/markup-compatibility/2006" xmlns:a14="http://schemas.microsoft.com/office/drawing/2010/main">
+        <mc:Choice Requires="a14">
           <p:sp>
             <p:nvSpPr>
               <p:cNvPr id="3" name="Content Placeholder 2"/>
@@ -16631,7 +16631,7 @@
             </p:txBody>
           </p:sp>
         </mc:Choice>
-        <mc:Fallback>
+        <mc:Fallback xmlns="">
           <p:sp>
             <p:nvSpPr>
               <p:cNvPr id="3" name="Content Placeholder 2"/>
@@ -17671,8 +17671,8 @@
           </a:p>
         </p:txBody>
       </p:sp>
-      <mc:AlternateContent xmlns:mc="http://schemas.openxmlformats.org/markup-compatibility/2006">
-        <mc:Choice xmlns:a14="http://schemas.microsoft.com/office/drawing/2010/main" Requires="a14">
+      <mc:AlternateContent xmlns:mc="http://schemas.openxmlformats.org/markup-compatibility/2006" xmlns:a14="http://schemas.microsoft.com/office/drawing/2010/main">
+        <mc:Choice Requires="a14">
           <p:sp>
             <p:nvSpPr>
               <p:cNvPr id="3" name="Content Placeholder 2"/>
@@ -17826,9 +17826,6 @@
                       <m:t>x</m:t>
                     </m:r>
                     <m:r>
-                      <m:rPr>
-                        <m:sty m:val="p"/>
-                      </m:rPr>
                       <a:rPr lang="en-US" i="0">
                         <a:solidFill>
                           <a:srgbClr val="000000"/>
@@ -17871,9 +17868,6 @@
                       <m:t>x</m:t>
                     </m:r>
                     <m:r>
-                      <m:rPr>
-                        <m:sty m:val="p"/>
-                      </m:rPr>
                       <a:rPr lang="en-US" i="0">
                         <a:solidFill>
                           <a:srgbClr val="000000"/>
@@ -17916,9 +17910,6 @@
                       <m:t>x</m:t>
                     </m:r>
                     <m:r>
-                      <m:rPr>
-                        <m:sty m:val="p"/>
-                      </m:rPr>
                       <a:rPr lang="en-US" i="0">
                         <a:solidFill>
                           <a:srgbClr val="000000"/>
@@ -17976,9 +17967,6 @@
                       <m:t>x</m:t>
                     </m:r>
                     <m:r>
-                      <m:rPr>
-                        <m:sty m:val="p"/>
-                      </m:rPr>
                       <a:rPr lang="en-US" i="0">
                         <a:solidFill>
                           <a:srgbClr val="000000"/>
@@ -18018,19 +18006,7 @@
                         </a:solidFill>
                         <a:latin typeface="Cambria Math"/>
                       </a:rPr>
-                      <m:t>x</m:t>
-                    </m:r>
-                    <m:r>
-                      <m:rPr>
-                        <m:sty m:val="p"/>
-                      </m:rPr>
-                      <a:rPr lang="en-US" i="0">
-                        <a:solidFill>
-                          <a:srgbClr val="000000"/>
-                        </a:solidFill>
-                        <a:latin typeface="Cambria Math"/>
-                      </a:rPr>
-                      <m:t>FF</m:t>
+                      <m:t>xFF</m:t>
                     </m:r>
                   </m:oMath>
                 </a14:m>
@@ -18105,7 +18081,7 @@
             </p:txBody>
           </p:sp>
         </mc:Choice>
-        <mc:Fallback>
+        <mc:Fallback xmlns="">
           <p:sp>
             <p:nvSpPr>
               <p:cNvPr id="3" name="Content Placeholder 2"/>
@@ -18428,8 +18404,8 @@
           </a:p>
         </p:txBody>
       </p:sp>
-      <mc:AlternateContent xmlns:mc="http://schemas.openxmlformats.org/markup-compatibility/2006">
-        <mc:Choice xmlns:a14="http://schemas.microsoft.com/office/drawing/2010/main" Requires="a14">
+      <mc:AlternateContent xmlns:mc="http://schemas.openxmlformats.org/markup-compatibility/2006" xmlns:a14="http://schemas.microsoft.com/office/drawing/2010/main">
+        <mc:Choice Requires="a14">
           <p:sp>
             <p:nvSpPr>
               <p:cNvPr id="3" name="Content Placeholder 2"/>
@@ -18465,7 +18441,7 @@
                     <m:sSub>
                       <m:sSubPr>
                         <m:ctrlPr>
-                          <a:rPr lang="en-US">
+                          <a:rPr lang="en-US" i="1">
                             <a:solidFill>
                               <a:srgbClr val="000000"/>
                             </a:solidFill>
@@ -18532,7 +18508,7 @@
                     <m:sSup>
                       <m:sSupPr>
                         <m:ctrlPr>
-                          <a:rPr lang="en-US">
+                          <a:rPr lang="en-US" i="1">
                             <a:solidFill>
                               <a:srgbClr val="000000"/>
                             </a:solidFill>
@@ -18602,7 +18578,7 @@
                     <m:sSub>
                       <m:sSubPr>
                         <m:ctrlPr>
-                          <a:rPr lang="en-US">
+                          <a:rPr lang="en-US" i="1">
                             <a:solidFill>
                               <a:srgbClr val="000000"/>
                             </a:solidFill>
@@ -18904,7 +18880,7 @@
                     <m:sSub>
                       <m:sSubPr>
                         <m:ctrlPr>
-                          <a:rPr lang="en-US">
+                          <a:rPr lang="en-US" i="1">
                             <a:solidFill>
                               <a:srgbClr val="000000"/>
                             </a:solidFill>
@@ -19097,7 +19073,7 @@
                     <m:sSub>
                       <m:sSubPr>
                         <m:ctrlPr>
-                          <a:rPr lang="en-US">
+                          <a:rPr lang="en-US" i="1">
                             <a:solidFill>
                               <a:srgbClr val="000000"/>
                             </a:solidFill>
@@ -19143,7 +19119,7 @@
                     <m:sSub>
                       <m:sSubPr>
                         <m:ctrlPr>
-                          <a:rPr lang="en-US">
+                          <a:rPr lang="en-US" i="1">
                             <a:solidFill>
                               <a:srgbClr val="000000"/>
                             </a:solidFill>
@@ -19189,7 +19165,7 @@
                     <m:sSub>
                       <m:sSubPr>
                         <m:ctrlPr>
-                          <a:rPr lang="en-US">
+                          <a:rPr lang="en-US" i="1">
                             <a:solidFill>
                               <a:srgbClr val="000000"/>
                             </a:solidFill>
@@ -19245,7 +19221,7 @@
                     <m:sSubSup>
                       <m:sSubSupPr>
                         <m:ctrlPr>
-                          <a:rPr lang="en-US">
+                          <a:rPr lang="en-US" i="1">
                             <a:solidFill>
                               <a:srgbClr val="000000"/>
                             </a:solidFill>
@@ -19302,7 +19278,7 @@
                     <m:sSup>
                       <m:sSupPr>
                         <m:ctrlPr>
-                          <a:rPr lang="en-US">
+                          <a:rPr lang="en-US" i="1">
                             <a:solidFill>
                               <a:srgbClr val="000000"/>
                             </a:solidFill>
@@ -19357,7 +19333,7 @@
                       <m:sSup>
                         <m:sSupPr>
                           <m:ctrlPr>
-                            <a:rPr lang="en-US">
+                            <a:rPr lang="en-US" i="1">
                               <a:solidFill>
                                 <a:srgbClr val="000000"/>
                               </a:solidFill>
@@ -19443,7 +19419,7 @@
             </p:txBody>
           </p:sp>
         </mc:Choice>
-        <mc:Fallback>
+        <mc:Fallback xmlns="">
           <p:sp>
             <p:nvSpPr>
               <p:cNvPr id="3" name="Content Placeholder 2"/>
@@ -19632,8 +19608,8 @@
           </a:p>
         </p:txBody>
       </p:sp>
-      <mc:AlternateContent xmlns:mc="http://schemas.openxmlformats.org/markup-compatibility/2006">
-        <mc:Choice xmlns:a14="http://schemas.microsoft.com/office/drawing/2010/main" Requires="a14">
+      <mc:AlternateContent xmlns:mc="http://schemas.openxmlformats.org/markup-compatibility/2006" xmlns:a14="http://schemas.microsoft.com/office/drawing/2010/main">
+        <mc:Choice Requires="a14">
           <p:sp>
             <p:nvSpPr>
               <p:cNvPr id="3" name="Content Placeholder 2"/>
@@ -19688,7 +19664,7 @@
                     <m:sSup>
                       <m:sSupPr>
                         <m:ctrlPr>
-                          <a:rPr lang="en-US">
+                          <a:rPr lang="en-US" i="1">
                             <a:solidFill>
                               <a:srgbClr val="000000"/>
                             </a:solidFill>
@@ -19734,7 +19710,7 @@
                     <m:sSub>
                       <m:sSubPr>
                         <m:ctrlPr>
-                          <a:rPr lang="en-US">
+                          <a:rPr lang="en-US" i="1">
                             <a:solidFill>
                               <a:srgbClr val="000000"/>
                             </a:solidFill>
@@ -19885,7 +19861,7 @@
                     <m:sSup>
                       <m:sSupPr>
                         <m:ctrlPr>
-                          <a:rPr lang="en-US">
+                          <a:rPr lang="en-US" i="1">
                             <a:solidFill>
                               <a:srgbClr val="000000"/>
                             </a:solidFill>
@@ -20010,7 +19986,7 @@
                     <m:sSub>
                       <m:sSubPr>
                         <m:ctrlPr>
-                          <a:rPr lang="en-US">
+                          <a:rPr lang="en-US" i="1">
                             <a:solidFill>
                               <a:srgbClr val="000000"/>
                             </a:solidFill>
@@ -20241,7 +20217,7 @@
                     <m:sSub>
                       <m:sSubPr>
                         <m:ctrlPr>
-                          <a:rPr lang="en-US">
+                          <a:rPr lang="en-US" i="1">
                             <a:solidFill>
                               <a:srgbClr val="000000"/>
                             </a:solidFill>
@@ -20491,7 +20467,7 @@
                     <m:sSub>
                       <m:sSubPr>
                         <m:ctrlPr>
-                          <a:rPr lang="en-US">
+                          <a:rPr lang="en-US" i="1">
                             <a:solidFill>
                               <a:srgbClr val="000000"/>
                             </a:solidFill>
@@ -20545,7 +20521,7 @@
                     <m:sSub>
                       <m:sSubPr>
                         <m:ctrlPr>
-                          <a:rPr lang="en-US">
+                          <a:rPr lang="en-US" i="1">
                             <a:solidFill>
                               <a:srgbClr val="000000"/>
                             </a:solidFill>
@@ -20707,7 +20683,7 @@
             </p:txBody>
           </p:sp>
         </mc:Choice>
-        <mc:Fallback>
+        <mc:Fallback xmlns="">
           <p:sp>
             <p:nvSpPr>
               <p:cNvPr id="3" name="Content Placeholder 2"/>
@@ -20862,8 +20838,8 @@
           </a:p>
         </p:txBody>
       </p:sp>
-      <mc:AlternateContent xmlns:mc="http://schemas.openxmlformats.org/markup-compatibility/2006">
-        <mc:Choice xmlns:a14="http://schemas.microsoft.com/office/drawing/2010/main" Requires="a14">
+      <mc:AlternateContent xmlns:mc="http://schemas.openxmlformats.org/markup-compatibility/2006" xmlns:a14="http://schemas.microsoft.com/office/drawing/2010/main">
+        <mc:Choice Requires="a14">
           <p:sp>
             <p:nvSpPr>
               <p:cNvPr id="3" name="Content Placeholder 2"/>
@@ -21015,7 +20991,7 @@
             </p:txBody>
           </p:sp>
         </mc:Choice>
-        <mc:Fallback>
+        <mc:Fallback xmlns="">
           <p:sp>
             <p:nvSpPr>
               <p:cNvPr id="3" name="Content Placeholder 2"/>
@@ -25818,8 +25794,8 @@
           </a:p>
         </p:txBody>
       </p:sp>
-      <mc:AlternateContent xmlns:mc="http://schemas.openxmlformats.org/markup-compatibility/2006">
-        <mc:Choice xmlns:a14="http://schemas.microsoft.com/office/drawing/2010/main" Requires="a14">
+      <mc:AlternateContent xmlns:mc="http://schemas.openxmlformats.org/markup-compatibility/2006" xmlns:a14="http://schemas.microsoft.com/office/drawing/2010/main">
+        <mc:Choice Requires="a14">
           <p:sp>
             <p:nvSpPr>
               <p:cNvPr id="3" name="Content Placeholder 2"/>
@@ -26241,7 +26217,7 @@
             </p:txBody>
           </p:sp>
         </mc:Choice>
-        <mc:Fallback>
+        <mc:Fallback xmlns="">
           <p:sp>
             <p:nvSpPr>
               <p:cNvPr id="3" name="Content Placeholder 2"/>
@@ -26379,8 +26355,8 @@
           </a:p>
         </p:txBody>
       </p:sp>
-      <mc:AlternateContent xmlns:mc="http://schemas.openxmlformats.org/markup-compatibility/2006">
-        <mc:Choice xmlns:a14="http://schemas.microsoft.com/office/drawing/2010/main" Requires="a14">
+      <mc:AlternateContent xmlns:mc="http://schemas.openxmlformats.org/markup-compatibility/2006" xmlns:a14="http://schemas.microsoft.com/office/drawing/2010/main">
+        <mc:Choice Requires="a14">
           <p:sp>
             <p:nvSpPr>
               <p:cNvPr id="3" name="Content Placeholder 2"/>
@@ -26435,7 +26411,7 @@
                     <m:sSup>
                       <m:sSupPr>
                         <m:ctrlPr>
-                          <a:rPr lang="en-US">
+                          <a:rPr lang="en-US" i="1">
                             <a:solidFill>
                               <a:srgbClr val="000000"/>
                             </a:solidFill>
@@ -26518,7 +26494,7 @@
                     <m:sSub>
                       <m:sSubPr>
                         <m:ctrlPr>
-                          <a:rPr lang="en-US">
+                          <a:rPr lang="en-US" i="1">
                             <a:solidFill>
                               <a:srgbClr val="000000"/>
                             </a:solidFill>
@@ -26559,9 +26535,16 @@
                   </a:rPr>
                   <a:t>로 쪼갠다 (블록 수 </a:t>
                 </a:r>
-                <a14:m xmlns:m="http://schemas.openxmlformats.org/officeDocument/2006/math">
-                  <m:oMath xmlns:mml="http://www.w3.org/1998/Math/MathML">
+                <a14:m>
+                  <m:oMath xmlns:m="http://schemas.openxmlformats.org/officeDocument/2006/math">
                     <m:sSub>
+                      <m:sSubPr>
+                        <m:ctrlPr>
+                          <a:rPr lang="en-US">
+                            <a:latin typeface="Cambria Math" panose="02040503050406030204" pitchFamily="18" charset="0"/>
+                          </a:rPr>
+                        </m:ctrlPr>
+                      </m:sSubPr>
                       <m:e>
                         <m:r>
                           <a:rPr lang="en-US" i="1">
@@ -26583,7 +26566,25 @@
                       <a:rPr lang="en-US" i="1">
                         <a:latin typeface="Cambria Math"/>
                       </a:rPr>
-                      <m:t>=n/w</m:t>
+                      <m:t>=</m:t>
+                    </m:r>
+                    <m:r>
+                      <a:rPr lang="en-US" i="1">
+                        <a:latin typeface="Cambria Math"/>
+                      </a:rPr>
+                      <m:t>𝑛</m:t>
+                    </m:r>
+                    <m:r>
+                      <a:rPr lang="en-US" i="1">
+                        <a:latin typeface="Cambria Math"/>
+                      </a:rPr>
+                      <m:t>/</m:t>
+                    </m:r>
+                    <m:r>
+                      <a:rPr lang="en-US" i="1">
+                        <a:latin typeface="Cambria Math"/>
+                      </a:rPr>
+                      <m:t>𝑤</m:t>
                     </m:r>
                   </m:oMath>
                 </a14:m>
@@ -26610,7 +26611,7 @@
                     <m:sSub>
                       <m:sSubPr>
                         <m:ctrlPr>
-                          <a:rPr lang="en-US">
+                          <a:rPr lang="en-US" i="1">
                             <a:solidFill>
                               <a:srgbClr val="000000"/>
                             </a:solidFill>
@@ -26785,7 +26786,7 @@
                     <m:sSub>
                       <m:sSubPr>
                         <m:ctrlPr>
-                          <a:rPr lang="en-US">
+                          <a:rPr lang="en-US" i="1">
                             <a:solidFill>
                               <a:srgbClr val="000000"/>
                             </a:solidFill>
@@ -26831,7 +26832,7 @@
                     <m:sSub>
                       <m:sSubPr>
                         <m:ctrlPr>
-                          <a:rPr lang="en-US">
+                          <a:rPr lang="en-US" i="1">
                             <a:solidFill>
                               <a:srgbClr val="000000"/>
                             </a:solidFill>
@@ -26884,7 +26885,7 @@
                     <m:sSub>
                       <m:sSubPr>
                         <m:ctrlPr>
-                          <a:rPr lang="en-US">
+                          <a:rPr lang="en-US" i="1">
                             <a:solidFill>
                               <a:srgbClr val="000000"/>
                             </a:solidFill>
@@ -27050,7 +27051,7 @@
                     <m:sSub>
                       <m:sSubPr>
                         <m:ctrlPr>
-                          <a:rPr lang="en-US">
+                          <a:rPr lang="en-US" i="1">
                             <a:solidFill>
                               <a:srgbClr val="000000"/>
                             </a:solidFill>
@@ -27106,7 +27107,7 @@
                     <m:sSup>
                       <m:sSupPr>
                         <m:ctrlPr>
-                          <a:rPr lang="en-US">
+                          <a:rPr lang="en-US" i="1">
                             <a:solidFill>
                               <a:srgbClr val="000000"/>
                             </a:solidFill>
@@ -27349,7 +27350,7 @@
             </p:txBody>
           </p:sp>
         </mc:Choice>
-        <mc:Fallback>
+        <mc:Fallback xmlns="">
           <p:sp>
             <p:nvSpPr>
               <p:cNvPr id="3" name="Content Placeholder 2"/>
@@ -27457,8 +27458,8 @@
           </a:p>
         </p:txBody>
       </p:sp>
-      <mc:AlternateContent xmlns:mc="http://schemas.openxmlformats.org/markup-compatibility/2006">
-        <mc:Choice xmlns:a14="http://schemas.microsoft.com/office/drawing/2010/main" Requires="a14">
+      <mc:AlternateContent xmlns:mc="http://schemas.openxmlformats.org/markup-compatibility/2006" xmlns:a14="http://schemas.microsoft.com/office/drawing/2010/main">
+        <mc:Choice Requires="a14">
           <p:sp>
             <p:nvSpPr>
               <p:cNvPr id="3" name="Content Placeholder 2"/>
@@ -27542,7 +27543,7 @@
                     <m:sSup>
                       <m:sSupPr>
                         <m:ctrlPr>
-                          <a:rPr lang="en-US">
+                          <a:rPr lang="en-US" i="1">
                             <a:solidFill>
                               <a:srgbClr val="000000"/>
                             </a:solidFill>
@@ -27606,7 +27607,7 @@
             </p:txBody>
           </p:sp>
         </mc:Choice>
-        <mc:Fallback>
+        <mc:Fallback xmlns="">
           <p:sp>
             <p:nvSpPr>
               <p:cNvPr id="3" name="Content Placeholder 2"/>
@@ -27714,8 +27715,8 @@
           </a:p>
         </p:txBody>
       </p:sp>
-      <mc:AlternateContent xmlns:mc="http://schemas.openxmlformats.org/markup-compatibility/2006">
-        <mc:Choice xmlns:a14="http://schemas.microsoft.com/office/drawing/2010/main" Requires="a14">
+      <mc:AlternateContent xmlns:mc="http://schemas.openxmlformats.org/markup-compatibility/2006" xmlns:a14="http://schemas.microsoft.com/office/drawing/2010/main">
+        <mc:Choice Requires="a14">
           <p:sp>
             <p:nvSpPr>
               <p:cNvPr id="3" name="Content Placeholder 2"/>
@@ -28310,7 +28311,7 @@
             </p:txBody>
           </p:sp>
         </mc:Choice>
-        <mc:Fallback>
+        <mc:Fallback xmlns="">
           <p:sp>
             <p:nvSpPr>
               <p:cNvPr id="3" name="Content Placeholder 2"/>

--- a/presentation/1001_16-17_Winternitz-Merkle-LMS.pptx
+++ b/presentation/1001_16-17_Winternitz-Merkle-LMS.pptx
@@ -23452,7 +23452,31 @@
                   <a:srgbClr val="000000"/>
                 </a:solidFill>
               </a:rPr>
-              <a:t>크래시 후 이전 상태로 복원되면 OTS 개인키가 재사용되어 안전성이 무너진다</a:t>
+              <a:t>크래시 후 </a:t>
+            </a:r>
+            <a:r>
+              <a:rPr lang="ko-KR" altLang="en-US">
+                <a:solidFill>
+                  <a:srgbClr val="000000"/>
+                </a:solidFill>
+              </a:rPr>
+              <a:t>이전 상태로</a:t>
+            </a:r>
+            <a:r>
+              <a:rPr>
+                <a:solidFill>
+                  <a:srgbClr val="000000"/>
+                </a:solidFill>
+              </a:rPr>
+              <a:t> </a:t>
+            </a:r>
+            <a:r>
+              <a:rPr dirty="0">
+                <a:solidFill>
+                  <a:srgbClr val="000000"/>
+                </a:solidFill>
+              </a:rPr>
+              <a:t>복원되면 OTS 개인키가 재사용되어 안전성이 무너진다</a:t>
             </a:r>
           </a:p>
           <a:p>
@@ -26540,7 +26564,7 @@
                     <m:sSub>
                       <m:sSubPr>
                         <m:ctrlPr>
-                          <a:rPr lang="en-US">
+                          <a:rPr lang="en-US" i="1">
                             <a:latin typeface="Cambria Math" panose="02040503050406030204" pitchFamily="18" charset="0"/>
                           </a:rPr>
                         </m:ctrlPr>
